--- a/public/fun/pack/pptx/weddingpro/결혼식프리미엄_02_러브스토리중심_블러시샴페인.pptx
+++ b/public/fun/pack/pptx/weddingpro/결혼식프리미엄_02_러브스토리중심_블러시샴페인.pptx
@@ -113,12 +113,12 @@
   <p:extLst>
     <p:ext uri="{521415D9-36F7-43E2-AB2F-B90AF26B5E84}">
       <p14:sectionLst xmlns:p14="http://schemas.microsoft.com/office/powerpoint/2010/main">
-        <p14:section name="시작" id="{D06DDAAF-0CC8-4AF1-A6AE-3436F064DD43}">
+        <p14:section name="시작" id="{4CCFEF9E-3DE8-4A73-998A-ADEEFFE9F04F}">
           <p14:sldIdLst>
             <p14:sldId id="256"/>
           </p14:sldIdLst>
         </p14:section>
-        <p14:section name="본문" id="{17D0247A-E46A-4DFD-9D0C-BD8238180666}">
+        <p14:section name="본문" id="{5C9D8FE5-5198-4D19-BBAE-B718228685B0}">
           <p14:sldIdLst>
             <p14:sldId id="257"/>
             <p14:sldId id="258"/>
@@ -127,7 +127,7 @@
             <p14:sldId id="261"/>
           </p14:sldIdLst>
         </p14:section>
-        <p14:section name="마무리" id="{BCA59CEA-8F26-4829-B2EF-6911AD022F24}">
+        <p14:section name="마무리" id="{4EEBDEDD-04F1-462D-97D3-B417B3DF0A71}">
           <p14:sldIdLst>
             <p14:sldId id="262"/>
           </p14:sldIdLst>
@@ -1556,7 +1556,7 @@
             </a:lvl1pPr>
           </a:lstStyle>
           <a:p>
-            <a:fld id="{7238085D-33E7-47DF-99A2-AB85542A9DA7}" type="slidenum">
+            <a:fld id="{ACF669F7-B711-46DB-9738-B6FDF4C27672}" type="slidenum">
               <a:rPr lang="en-US"/>
               <a:t>‹#›</a:t>
             </a:fld>
@@ -2180,7 +2180,7 @@
             </a:lvl1pPr>
           </a:lstStyle>
           <a:p>
-            <a:fld id="{B1257FC1-82DE-45EA-8F41-69E36593A1F6}" type="slidenum">
+            <a:fld id="{2BB76107-52CD-495B-9515-73202C435505}" type="slidenum">
               <a:rPr lang="en-US"/>
               <a:t>‹#›</a:t>
             </a:fld>
@@ -2769,7 +2769,7 @@
             </a:lvl1pPr>
           </a:lstStyle>
           <a:p>
-            <a:fld id="{F7C611AC-2192-466C-BCC9-5D620864BD76}" type="slidenum">
+            <a:fld id="{09B0911A-F88C-43C6-9E8A-EDF5ED30B3A0}" type="slidenum">
               <a:rPr lang="en-US"/>
               <a:t>‹#›</a:t>
             </a:fld>
@@ -3578,7 +3578,7 @@
           <a:p>
             <a:r>
               <a:rPr lang="ko-KR"/>
-              <a:t>0000. 00. 00 · 예식장 이름</a:t>
+              <a:t>날짜 입력 · 예식장 이름</a:t>
             </a:r>
           </a:p>
         </p:txBody>
@@ -3813,7 +3813,7 @@
           <a:bodyPr/>
           <a:lstStyle/>
           <a:p>
-            <a:fld id="{56236959-21B0-431B-9849-2B6E7F66462D}" type="slidenum">
+            <a:fld id="{0EB02244-9C19-4101-8AC7-132DFDD9F86C}" type="slidenum">
               <a:rPr lang="en-US"/>
               <a:t>‹#›</a:t>
             </a:fld>
@@ -4215,7 +4215,7 @@
           <a:bodyPr/>
           <a:lstStyle/>
           <a:p>
-            <a:fld id="{3B169DD9-5B24-4BF2-B8C7-901474B96E0E}" type="slidenum">
+            <a:fld id="{67DEB0DD-C008-42C2-9C29-CB55497C9F0C}" type="slidenum">
               <a:rPr lang="en-US"/>
               <a:t>‹#›</a:t>
             </a:fld>
@@ -5190,7 +5190,7 @@
           <a:bodyPr/>
           <a:lstStyle/>
           <a:p>
-            <a:fld id="{C1C55CCA-8295-4746-916F-E1E4B3C90C38}" type="slidenum">
+            <a:fld id="{E8E6379E-9E38-41BE-A42C-D11183D76AF0}" type="slidenum">
               <a:rPr lang="en-US"/>
               <a:t>‹#›</a:t>
             </a:fld>
@@ -6680,7 +6680,7 @@
           <a:bodyPr/>
           <a:lstStyle/>
           <a:p>
-            <a:fld id="{FB4C0006-3203-432E-BF2E-FEBFB6374554}" type="slidenum">
+            <a:fld id="{A735ACC9-F911-4A53-B846-95DB2627681C}" type="slidenum">
               <a:rPr lang="en-US"/>
               <a:t>‹#›</a:t>
             </a:fld>
@@ -6768,7 +6768,7 @@
           <a:bodyPr/>
           <a:lstStyle/>
           <a:p>
-            <a:fld id="{F661F4B4-D187-4BC6-82E9-A4ADA16342DB}" type="slidenum">
+            <a:fld id="{AFFC12AC-E9D4-42C0-A0AF-97CC76789977}" type="slidenum">
               <a:rPr lang="en-US"/>
               <a:t>‹#›</a:t>
             </a:fld>
